--- a/classes/parte-14-grc-riesgo-y-cumplimiento/283-continuidad-de-negocio-y-plan-de-recuperacion-ante-desastres/clase-283-presentacion.pptx
+++ b/classes/parte-14-grc-riesgo-y-cumplimiento/283-continuidad-de-negocio-y-plan-de-recuperacion-ante-desastres/clase-283-presentacion.pptx
@@ -17,6 +17,10 @@
     <p:sldId id="265" r:id="rId16"/>
     <p:sldId id="266" r:id="rId17"/>
     <p:sldId id="267" r:id="rId18"/>
+    <p:sldId id="268" r:id="rId19"/>
+    <p:sldId id="269" r:id="rId20"/>
+    <p:sldId id="270" r:id="rId21"/>
+    <p:sldId id="271" r:id="rId22"/>
   </p:sldIdLst>
   <p:sldSz cx="9144000" cy="6858000" type="screen4x3"/>
   <p:notesSz cx="6858000" cy="9144000"/>
@@ -3198,7 +3202,7 @@
                   <a:srgbClr val="0B3D2E"/>
                 </a:solidFill>
               </a:rPr>
-              <a:t>⚠️ Errores comunes</a:t>
+              <a:t>🧪 Laboratorio guiado (ejercicio aplicado)</a:t>
             </a:r>
           </a:p>
         </p:txBody>
@@ -3236,67 +3240,97 @@
                   <a:srgbClr val="22282E"/>
                 </a:solidFill>
               </a:rPr>
-              <a:t>•  Backups que nunca se prueban al restaurar — Un backup sin restore verificado no es un backup; prueba periódicamente</a:t>
-            </a:r>
-          </a:p>
-          <a:p>
-            <a:pPr>
-              <a:spcAft>
-                <a:spcPts val="600"/>
-              </a:spcAft>
-            </a:pPr>
-            <a:r>
-              <a:rPr sz="1500">
-                <a:solidFill>
-                  <a:srgbClr val="22282E"/>
-                </a:solidFill>
-              </a:rPr>
-              <a:t>•  RTO/RPO fijados sin BIA — Números arbitrarios; deriva de impacto en el negocio</a:t>
-            </a:r>
-          </a:p>
-          <a:p>
-            <a:pPr>
-              <a:spcAft>
-                <a:spcPts val="600"/>
-              </a:spcAft>
-            </a:pPr>
-            <a:r>
-              <a:rPr sz="1500">
-                <a:solidFill>
-                  <a:srgbClr val="22282E"/>
-                </a:solidFill>
-              </a:rPr>
-              <a:t>•  Backups en la misma red que producción — El ransomware los cifra también; usa copias inmutables/offline</a:t>
-            </a:r>
-          </a:p>
-          <a:p>
-            <a:pPr>
-              <a:spcAft>
-                <a:spcPts val="600"/>
-              </a:spcAft>
-            </a:pPr>
-            <a:r>
-              <a:rPr sz="1500">
-                <a:solidFill>
-                  <a:srgbClr val="22282E"/>
-                </a:solidFill>
-              </a:rPr>
-              <a:t>•  Confundir alta disponibilidad con backup — HA protege de fallo de hardware, no de borrado/cifrado malicioso</a:t>
-            </a:r>
-          </a:p>
-          <a:p>
-            <a:pPr>
-              <a:spcAft>
-                <a:spcPts val="600"/>
-              </a:spcAft>
-            </a:pPr>
-            <a:r>
-              <a:rPr sz="1500">
-                <a:solidFill>
-                  <a:srgbClr val="22282E"/>
-                </a:solidFill>
-              </a:rPr>
-              <a:t>•  Plan escrito pero nunca ejercitado — Falla en el peor momento; haz tabletops y simulacros</a:t>
+              <a:t>•  Parte A — BIA y métricas para "Ferretería del Sur S.A.":</a:t>
+            </a:r>
+          </a:p>
+          <a:p>
+            <a:pPr>
+              <a:spcAft>
+                <a:spcPts val="600"/>
+              </a:spcAft>
+            </a:pPr>
+            <a:r>
+              <a:rPr sz="1500">
+                <a:solidFill>
+                  <a:srgbClr val="22282E"/>
+                </a:solidFill>
+              </a:rPr>
+              <a:t>•  Inventario de procesos: lista 5 procesos (venta online, procesamiento de pagos, atención al cliente, facturación, marketing).</a:t>
+            </a:r>
+          </a:p>
+          <a:p>
+            <a:pPr>
+              <a:spcAft>
+                <a:spcPts val="600"/>
+              </a:spcAft>
+            </a:pPr>
+            <a:r>
+              <a:rPr sz="1500">
+                <a:solidFill>
+                  <a:srgbClr val="22282E"/>
+                </a:solidFill>
+              </a:rPr>
+              <a:t>•  Impacto en el tiempo: para cada proceso, estima el impacto (€/hora de caída) a 1 h, 8 h, 24 h y 72 h.</a:t>
+            </a:r>
+          </a:p>
+          <a:p>
+            <a:pPr>
+              <a:spcAft>
+                <a:spcPts val="600"/>
+              </a:spcAft>
+            </a:pPr>
+            <a:r>
+              <a:rPr sz="1500">
+                <a:solidFill>
+                  <a:srgbClr val="22282E"/>
+                </a:solidFill>
+              </a:rPr>
+              <a:t>•  Criticidad: clasifica cada proceso en crítico/importante/no crítico según su impacto.</a:t>
+            </a:r>
+          </a:p>
+          <a:p>
+            <a:pPr>
+              <a:spcAft>
+                <a:spcPts val="600"/>
+              </a:spcAft>
+            </a:pPr>
+            <a:r>
+              <a:rPr sz="1500">
+                <a:solidFill>
+                  <a:srgbClr val="22282E"/>
+                </a:solidFill>
+              </a:rPr>
+              <a:t>•  RTO/RPO/MTD: asigna a cada proceso crítico un MTD, un RTO (&lt; MTD) y un RPO. Ej.: pagos → MTD 4 h, RTO 1 h, RPO 15 min.</a:t>
+            </a:r>
+          </a:p>
+          <a:p>
+            <a:pPr>
+              <a:spcAft>
+                <a:spcPts val="600"/>
+              </a:spcAft>
+            </a:pPr>
+            <a:r>
+              <a:rPr sz="1500">
+                <a:solidFill>
+                  <a:srgbClr val="22282E"/>
+                </a:solidFill>
+              </a:rPr>
+              <a:t>•  Estrategia de recuperación: para cada proceso crítico elige la estrategia (HA activo-activo, sitio caliente, restauración desde backup) coherente con su RTO/RPO.</a:t>
+            </a:r>
+          </a:p>
+          <a:p>
+            <a:pPr>
+              <a:spcAft>
+                <a:spcPts val="600"/>
+              </a:spcAft>
+            </a:pPr>
+            <a:r>
+              <a:rPr sz="1500">
+                <a:solidFill>
+                  <a:srgbClr val="22282E"/>
+                </a:solidFill>
+              </a:rPr>
+              <a:t>•  Parte B — Backup 3-2-1 real (VM):</a:t>
             </a:r>
           </a:p>
         </p:txBody>
@@ -3347,7 +3381,7 @@
                   <a:srgbClr val="0B3D2E"/>
                 </a:solidFill>
               </a:rPr>
-              <a:t>❓ Preguntas frecuentes</a:t>
+              <a:t>✍️ Ejercicios</a:t>
             </a:r>
           </a:p>
         </p:txBody>
@@ -3385,97 +3419,82 @@
                   <a:srgbClr val="22282E"/>
                 </a:solidFill>
               </a:rPr>
-              <a:t>•  ❓ ¿BCP y DRP son lo mismo?</a:t>
-            </a:r>
-          </a:p>
-          <a:p>
-            <a:pPr>
-              <a:spcAft>
-                <a:spcPts val="600"/>
-              </a:spcAft>
-            </a:pPr>
-            <a:r>
-              <a:rPr sz="1500">
-                <a:solidFill>
-                  <a:srgbClr val="22282E"/>
-                </a:solidFill>
-              </a:rPr>
-              <a:t>•  No. El BCP cubre todo el negocio (personas, procesos, instalaciones); el DRP es la parte tecnológica de restaurar sistemas. El DRP vive dentro del BCP.</a:t>
-            </a:r>
-          </a:p>
-          <a:p>
-            <a:pPr>
-              <a:spcAft>
-                <a:spcPts val="600"/>
-              </a:spcAft>
-            </a:pPr>
-            <a:r>
-              <a:rPr sz="1500">
-                <a:solidFill>
-                  <a:srgbClr val="22282E"/>
-                </a:solidFill>
-              </a:rPr>
-              <a:t>•  ❓ ¿Qué es la regla 3-2-1?</a:t>
-            </a:r>
-          </a:p>
-          <a:p>
-            <a:pPr>
-              <a:spcAft>
-                <a:spcPts val="600"/>
-              </a:spcAft>
-            </a:pPr>
-            <a:r>
-              <a:rPr sz="1500">
-                <a:solidFill>
-                  <a:srgbClr val="22282E"/>
-                </a:solidFill>
-              </a:rPr>
-              <a:t>•  Tres copias de los datos, en dos medios distintos, con una copia fuera de sitio (offsite). La variante 3-2-1-1-0 añade una copia inmutable/air-gapped y cero errores verificados.</a:t>
-            </a:r>
-          </a:p>
-          <a:p>
-            <a:pPr>
-              <a:spcAft>
-                <a:spcPts val="600"/>
-              </a:spcAft>
-            </a:pPr>
-            <a:r>
-              <a:rPr sz="1500">
-                <a:solidFill>
-                  <a:srgbClr val="22282E"/>
-                </a:solidFill>
-              </a:rPr>
-              <a:t>•  ❓ ¿Cada cuánto pruebo el plan?</a:t>
-            </a:r>
-          </a:p>
-          <a:p>
-            <a:pPr>
-              <a:spcAft>
-                <a:spcPts val="600"/>
-              </a:spcAft>
-            </a:pPr>
-            <a:r>
-              <a:rPr sz="1500">
-                <a:solidFill>
-                  <a:srgbClr val="22282E"/>
-                </a:solidFill>
-              </a:rPr>
-              <a:t>•  Tabletops al menos anualmente; simulacros de failover según criticidad. Cada prueba genera lecciones que actualizan el plan.</a:t>
-            </a:r>
-          </a:p>
-          <a:p>
-            <a:pPr>
-              <a:spcAft>
-                <a:spcPts val="600"/>
-              </a:spcAft>
-            </a:pPr>
-            <a:r>
-              <a:rPr sz="1500">
-                <a:solidFill>
-                  <a:srgbClr val="22282E"/>
-                </a:solidFill>
-              </a:rPr>
-              <a:t>•  ❓ ¿La nube me exime de tener DRP?</a:t>
+              <a:t>•  Explica la diferencia entre RTO y RPO con un dibujo temporal.</a:t>
+            </a:r>
+          </a:p>
+          <a:p>
+            <a:pPr>
+              <a:spcAft>
+                <a:spcPts val="600"/>
+              </a:spcAft>
+            </a:pPr>
+            <a:r>
+              <a:rPr sz="1500">
+                <a:solidFill>
+                  <a:srgbClr val="22282E"/>
+                </a:solidFill>
+              </a:rPr>
+              <a:t>•  ¿Por qué el RTO siempre debe ser menor que el MTD?</a:t>
+            </a:r>
+          </a:p>
+          <a:p>
+            <a:pPr>
+              <a:spcAft>
+                <a:spcPts val="600"/>
+              </a:spcAft>
+            </a:pPr>
+            <a:r>
+              <a:rPr sz="1500">
+                <a:solidFill>
+                  <a:srgbClr val="22282E"/>
+                </a:solidFill>
+              </a:rPr>
+              <a:t>•  Ordena sitios frío, tibio y caliente por coste y por velocidad de recuperación.</a:t>
+            </a:r>
+          </a:p>
+          <a:p>
+            <a:pPr>
+              <a:spcAft>
+                <a:spcPts val="600"/>
+              </a:spcAft>
+            </a:pPr>
+            <a:r>
+              <a:rPr sz="1500">
+                <a:solidFill>
+                  <a:srgbClr val="22282E"/>
+                </a:solidFill>
+              </a:rPr>
+              <a:t>•  Aplica la regla 3-2-1 a un escenario y explica cómo protege frente a ransomware.</a:t>
+            </a:r>
+          </a:p>
+          <a:p>
+            <a:pPr>
+              <a:spcAft>
+                <a:spcPts val="600"/>
+              </a:spcAft>
+            </a:pPr>
+            <a:r>
+              <a:rPr sz="1500">
+                <a:solidFill>
+                  <a:srgbClr val="22282E"/>
+                </a:solidFill>
+              </a:rPr>
+              <a:t>•  Diseña un BIA de 3 procesos para una clínica dental.</a:t>
+            </a:r>
+          </a:p>
+          <a:p>
+            <a:pPr>
+              <a:spcAft>
+                <a:spcPts val="600"/>
+              </a:spcAft>
+            </a:pPr>
+            <a:r>
+              <a:rPr sz="1500">
+                <a:solidFill>
+                  <a:srgbClr val="22282E"/>
+                </a:solidFill>
+              </a:rPr>
+              <a:t>•  Propón tres tipos de prueba del plan y cuándo usar cada una.</a:t>
             </a:r>
           </a:p>
         </p:txBody>
@@ -3526,7 +3545,7 @@
                   <a:srgbClr val="0B3D2E"/>
                 </a:solidFill>
               </a:rPr>
-              <a:t>🔗 Referencias</a:t>
+              <a:t>📝 Reto verificable</a:t>
             </a:r>
           </a:p>
         </p:txBody>
@@ -3564,6 +3583,438 @@
                   <a:srgbClr val="22282E"/>
                 </a:solidFill>
               </a:rPr>
+              <a:t>•  Entrega un BCP/DRP mínimo viable con: BIA de al menos 5 procesos, tabla RTO/RPO/MTD de los críticos, estrategia de recuperación por proceso, y evidencia de un backup/restore real (tiempo medido) más…</a:t>
+            </a:r>
+          </a:p>
+          <a:p>
+            <a:pPr>
+              <a:spcAft>
+                <a:spcPts val="600"/>
+              </a:spcAft>
+            </a:pPr>
+            <a:r>
+              <a:rPr sz="1500">
+                <a:solidFill>
+                  <a:srgbClr val="22282E"/>
+                </a:solidFill>
+              </a:rPr>
+              <a:t>•  Criterio de aceptación: todo proceso crítico tiene RTO &lt; MTD y un RPO coherente con su frecuencia de backup, la restauración real funciona (dato recuperado) y su tiempo se compara con el RTO objetivo.</a:t>
+            </a:r>
+          </a:p>
+        </p:txBody>
+      </p:sp>
+    </p:spTree>
+  </p:cSld>
+  <p:clrMapOvr>
+    <a:masterClrMapping/>
+  </p:clrMapOvr>
+</p:sld>
+</file>
+
+<file path=ppt/slides/slide13.xml><?xml version="1.0" encoding="utf-8"?>
+<p:sld xmlns:a="http://schemas.openxmlformats.org/drawingml/2006/main" xmlns:p="http://schemas.openxmlformats.org/presentationml/2006/main" xmlns:r="http://schemas.openxmlformats.org/officeDocument/2006/relationships">
+  <p:cSld>
+    <p:spTree>
+      <p:nvGrpSpPr>
+        <p:cNvPr id="1" name=""/>
+        <p:cNvGrpSpPr/>
+        <p:nvPr/>
+      </p:nvGrpSpPr>
+      <p:grpSpPr/>
+      <p:sp>
+        <p:nvSpPr>
+          <p:cNvPr id="2" name="TextBox 1"/>
+          <p:cNvSpPr txBox="1"/>
+          <p:nvPr/>
+        </p:nvSpPr>
+        <p:spPr>
+          <a:xfrm>
+            <a:off x="457200" y="320040"/>
+            <a:ext cx="8229600" cy="822960"/>
+          </a:xfrm>
+          <a:prstGeom prst="rect">
+            <a:avLst/>
+          </a:prstGeom>
+          <a:noFill/>
+        </p:spPr>
+        <p:txBody>
+          <a:bodyPr wrap="square">
+            <a:spAutoFit/>
+          </a:bodyPr>
+          <a:lstStyle/>
+          <a:p>
+            <a:r>
+              <a:rPr sz="2600" b="1">
+                <a:solidFill>
+                  <a:srgbClr val="0B3D2E"/>
+                </a:solidFill>
+              </a:rPr>
+              <a:t>⚠️ Errores comunes</a:t>
+            </a:r>
+          </a:p>
+        </p:txBody>
+      </p:sp>
+      <p:sp>
+        <p:nvSpPr>
+          <p:cNvPr id="3" name="TextBox 2"/>
+          <p:cNvSpPr txBox="1"/>
+          <p:nvPr/>
+        </p:nvSpPr>
+        <p:spPr>
+          <a:xfrm>
+            <a:off x="457200" y="1280160"/>
+            <a:ext cx="8229600" cy="4937760"/>
+          </a:xfrm>
+          <a:prstGeom prst="rect">
+            <a:avLst/>
+          </a:prstGeom>
+          <a:noFill/>
+        </p:spPr>
+        <p:txBody>
+          <a:bodyPr wrap="square">
+            <a:spAutoFit/>
+          </a:bodyPr>
+          <a:lstStyle/>
+          <a:p>
+            <a:pPr>
+              <a:spcAft>
+                <a:spcPts val="600"/>
+              </a:spcAft>
+            </a:pPr>
+            <a:r>
+              <a:rPr sz="1500">
+                <a:solidFill>
+                  <a:srgbClr val="22282E"/>
+                </a:solidFill>
+              </a:rPr>
+              <a:t>•  Backups que nunca se prueban al restaurar — Un backup sin restore verificado no es un backup; prueba periódicamente</a:t>
+            </a:r>
+          </a:p>
+          <a:p>
+            <a:pPr>
+              <a:spcAft>
+                <a:spcPts val="600"/>
+              </a:spcAft>
+            </a:pPr>
+            <a:r>
+              <a:rPr sz="1500">
+                <a:solidFill>
+                  <a:srgbClr val="22282E"/>
+                </a:solidFill>
+              </a:rPr>
+              <a:t>•  RTO/RPO fijados sin BIA — Números arbitrarios; deriva de impacto en el negocio</a:t>
+            </a:r>
+          </a:p>
+          <a:p>
+            <a:pPr>
+              <a:spcAft>
+                <a:spcPts val="600"/>
+              </a:spcAft>
+            </a:pPr>
+            <a:r>
+              <a:rPr sz="1500">
+                <a:solidFill>
+                  <a:srgbClr val="22282E"/>
+                </a:solidFill>
+              </a:rPr>
+              <a:t>•  Backups en la misma red que producción — El ransomware los cifra también; usa copias inmutables/offline</a:t>
+            </a:r>
+          </a:p>
+          <a:p>
+            <a:pPr>
+              <a:spcAft>
+                <a:spcPts val="600"/>
+              </a:spcAft>
+            </a:pPr>
+            <a:r>
+              <a:rPr sz="1500">
+                <a:solidFill>
+                  <a:srgbClr val="22282E"/>
+                </a:solidFill>
+              </a:rPr>
+              <a:t>•  Confundir alta disponibilidad con backup — HA protege de fallo de hardware, no de borrado/cifrado malicioso</a:t>
+            </a:r>
+          </a:p>
+          <a:p>
+            <a:pPr>
+              <a:spcAft>
+                <a:spcPts val="600"/>
+              </a:spcAft>
+            </a:pPr>
+            <a:r>
+              <a:rPr sz="1500">
+                <a:solidFill>
+                  <a:srgbClr val="22282E"/>
+                </a:solidFill>
+              </a:rPr>
+              <a:t>•  Plan escrito pero nunca ejercitado — Falla en el peor momento; haz tabletops y simulacros</a:t>
+            </a:r>
+          </a:p>
+        </p:txBody>
+      </p:sp>
+    </p:spTree>
+  </p:cSld>
+  <p:clrMapOvr>
+    <a:masterClrMapping/>
+  </p:clrMapOvr>
+</p:sld>
+</file>
+
+<file path=ppt/slides/slide14.xml><?xml version="1.0" encoding="utf-8"?>
+<p:sld xmlns:a="http://schemas.openxmlformats.org/drawingml/2006/main" xmlns:p="http://schemas.openxmlformats.org/presentationml/2006/main" xmlns:r="http://schemas.openxmlformats.org/officeDocument/2006/relationships">
+  <p:cSld>
+    <p:spTree>
+      <p:nvGrpSpPr>
+        <p:cNvPr id="1" name=""/>
+        <p:cNvGrpSpPr/>
+        <p:nvPr/>
+      </p:nvGrpSpPr>
+      <p:grpSpPr/>
+      <p:sp>
+        <p:nvSpPr>
+          <p:cNvPr id="2" name="TextBox 1"/>
+          <p:cNvSpPr txBox="1"/>
+          <p:nvPr/>
+        </p:nvSpPr>
+        <p:spPr>
+          <a:xfrm>
+            <a:off x="457200" y="320040"/>
+            <a:ext cx="8229600" cy="822960"/>
+          </a:xfrm>
+          <a:prstGeom prst="rect">
+            <a:avLst/>
+          </a:prstGeom>
+          <a:noFill/>
+        </p:spPr>
+        <p:txBody>
+          <a:bodyPr wrap="square">
+            <a:spAutoFit/>
+          </a:bodyPr>
+          <a:lstStyle/>
+          <a:p>
+            <a:r>
+              <a:rPr sz="2600" b="1">
+                <a:solidFill>
+                  <a:srgbClr val="0B3D2E"/>
+                </a:solidFill>
+              </a:rPr>
+              <a:t>❓ Preguntas frecuentes</a:t>
+            </a:r>
+          </a:p>
+        </p:txBody>
+      </p:sp>
+      <p:sp>
+        <p:nvSpPr>
+          <p:cNvPr id="3" name="TextBox 2"/>
+          <p:cNvSpPr txBox="1"/>
+          <p:nvPr/>
+        </p:nvSpPr>
+        <p:spPr>
+          <a:xfrm>
+            <a:off x="457200" y="1280160"/>
+            <a:ext cx="8229600" cy="4937760"/>
+          </a:xfrm>
+          <a:prstGeom prst="rect">
+            <a:avLst/>
+          </a:prstGeom>
+          <a:noFill/>
+        </p:spPr>
+        <p:txBody>
+          <a:bodyPr wrap="square">
+            <a:spAutoFit/>
+          </a:bodyPr>
+          <a:lstStyle/>
+          <a:p>
+            <a:pPr>
+              <a:spcAft>
+                <a:spcPts val="600"/>
+              </a:spcAft>
+            </a:pPr>
+            <a:r>
+              <a:rPr sz="1500">
+                <a:solidFill>
+                  <a:srgbClr val="22282E"/>
+                </a:solidFill>
+              </a:rPr>
+              <a:t>•  ❓ ¿BCP y DRP son lo mismo?</a:t>
+            </a:r>
+          </a:p>
+          <a:p>
+            <a:pPr>
+              <a:spcAft>
+                <a:spcPts val="600"/>
+              </a:spcAft>
+            </a:pPr>
+            <a:r>
+              <a:rPr sz="1500">
+                <a:solidFill>
+                  <a:srgbClr val="22282E"/>
+                </a:solidFill>
+              </a:rPr>
+              <a:t>•  No. El BCP cubre todo el negocio (personas, procesos, instalaciones); el DRP es la parte tecnológica de restaurar sistemas. El DRP vive dentro del BCP.</a:t>
+            </a:r>
+          </a:p>
+          <a:p>
+            <a:pPr>
+              <a:spcAft>
+                <a:spcPts val="600"/>
+              </a:spcAft>
+            </a:pPr>
+            <a:r>
+              <a:rPr sz="1500">
+                <a:solidFill>
+                  <a:srgbClr val="22282E"/>
+                </a:solidFill>
+              </a:rPr>
+              <a:t>•  ❓ ¿Qué es la regla 3-2-1?</a:t>
+            </a:r>
+          </a:p>
+          <a:p>
+            <a:pPr>
+              <a:spcAft>
+                <a:spcPts val="600"/>
+              </a:spcAft>
+            </a:pPr>
+            <a:r>
+              <a:rPr sz="1500">
+                <a:solidFill>
+                  <a:srgbClr val="22282E"/>
+                </a:solidFill>
+              </a:rPr>
+              <a:t>•  Tres copias de los datos, en dos medios distintos, con una copia fuera de sitio (offsite). La variante 3-2-1-1-0 añade una copia inmutable/air-gapped y cero errores verificados.</a:t>
+            </a:r>
+          </a:p>
+          <a:p>
+            <a:pPr>
+              <a:spcAft>
+                <a:spcPts val="600"/>
+              </a:spcAft>
+            </a:pPr>
+            <a:r>
+              <a:rPr sz="1500">
+                <a:solidFill>
+                  <a:srgbClr val="22282E"/>
+                </a:solidFill>
+              </a:rPr>
+              <a:t>•  ❓ ¿Cada cuánto pruebo el plan?</a:t>
+            </a:r>
+          </a:p>
+          <a:p>
+            <a:pPr>
+              <a:spcAft>
+                <a:spcPts val="600"/>
+              </a:spcAft>
+            </a:pPr>
+            <a:r>
+              <a:rPr sz="1500">
+                <a:solidFill>
+                  <a:srgbClr val="22282E"/>
+                </a:solidFill>
+              </a:rPr>
+              <a:t>•  Tabletops al menos anualmente; simulacros de failover según criticidad. Cada prueba genera lecciones que actualizan el plan.</a:t>
+            </a:r>
+          </a:p>
+          <a:p>
+            <a:pPr>
+              <a:spcAft>
+                <a:spcPts val="600"/>
+              </a:spcAft>
+            </a:pPr>
+            <a:r>
+              <a:rPr sz="1500">
+                <a:solidFill>
+                  <a:srgbClr val="22282E"/>
+                </a:solidFill>
+              </a:rPr>
+              <a:t>•  ❓ ¿La nube me exime de tener DRP?</a:t>
+            </a:r>
+          </a:p>
+        </p:txBody>
+      </p:sp>
+    </p:spTree>
+  </p:cSld>
+  <p:clrMapOvr>
+    <a:masterClrMapping/>
+  </p:clrMapOvr>
+</p:sld>
+</file>
+
+<file path=ppt/slides/slide15.xml><?xml version="1.0" encoding="utf-8"?>
+<p:sld xmlns:a="http://schemas.openxmlformats.org/drawingml/2006/main" xmlns:p="http://schemas.openxmlformats.org/presentationml/2006/main" xmlns:r="http://schemas.openxmlformats.org/officeDocument/2006/relationships">
+  <p:cSld>
+    <p:spTree>
+      <p:nvGrpSpPr>
+        <p:cNvPr id="1" name=""/>
+        <p:cNvGrpSpPr/>
+        <p:nvPr/>
+      </p:nvGrpSpPr>
+      <p:grpSpPr/>
+      <p:sp>
+        <p:nvSpPr>
+          <p:cNvPr id="2" name="TextBox 1"/>
+          <p:cNvSpPr txBox="1"/>
+          <p:nvPr/>
+        </p:nvSpPr>
+        <p:spPr>
+          <a:xfrm>
+            <a:off x="457200" y="320040"/>
+            <a:ext cx="8229600" cy="822960"/>
+          </a:xfrm>
+          <a:prstGeom prst="rect">
+            <a:avLst/>
+          </a:prstGeom>
+          <a:noFill/>
+        </p:spPr>
+        <p:txBody>
+          <a:bodyPr wrap="square">
+            <a:spAutoFit/>
+          </a:bodyPr>
+          <a:lstStyle/>
+          <a:p>
+            <a:r>
+              <a:rPr sz="2600" b="1">
+                <a:solidFill>
+                  <a:srgbClr val="0B3D2E"/>
+                </a:solidFill>
+              </a:rPr>
+              <a:t>🔗 Referencias</a:t>
+            </a:r>
+          </a:p>
+        </p:txBody>
+      </p:sp>
+      <p:sp>
+        <p:nvSpPr>
+          <p:cNvPr id="3" name="TextBox 2"/>
+          <p:cNvSpPr txBox="1"/>
+          <p:nvPr/>
+        </p:nvSpPr>
+        <p:spPr>
+          <a:xfrm>
+            <a:off x="457200" y="1280160"/>
+            <a:ext cx="8229600" cy="4937760"/>
+          </a:xfrm>
+          <a:prstGeom prst="rect">
+            <a:avLst/>
+          </a:prstGeom>
+          <a:noFill/>
+        </p:spPr>
+        <p:txBody>
+          <a:bodyPr wrap="square">
+            <a:spAutoFit/>
+          </a:bodyPr>
+          <a:lstStyle/>
+          <a:p>
+            <a:pPr>
+              <a:spcAft>
+                <a:spcPts val="600"/>
+              </a:spcAft>
+            </a:pPr>
+            <a:r>
+              <a:rPr sz="1500">
+                <a:solidFill>
+                  <a:srgbClr val="22282E"/>
+                </a:solidFill>
+              </a:rPr>
               <a:t>•  ISO 22301:2019 — Business Continuity Management. &lt;https://www.iso.org/standard/75106.html&gt;</a:t>
             </a:r>
           </a:p>
@@ -3629,6 +4080,81 @@
           </a:p>
         </p:txBody>
       </p:sp>
+    </p:spTree>
+  </p:cSld>
+  <p:clrMapOvr>
+    <a:masterClrMapping/>
+  </p:clrMapOvr>
+</p:sld>
+</file>
+
+<file path=ppt/slides/slide16.xml><?xml version="1.0" encoding="utf-8"?>
+<p:sld xmlns:a="http://schemas.openxmlformats.org/drawingml/2006/main" xmlns:p="http://schemas.openxmlformats.org/presentationml/2006/main" xmlns:r="http://schemas.openxmlformats.org/officeDocument/2006/relationships">
+  <p:cSld>
+    <p:spTree>
+      <p:nvGrpSpPr>
+        <p:cNvPr id="1" name=""/>
+        <p:cNvGrpSpPr/>
+        <p:nvPr/>
+      </p:nvGrpSpPr>
+      <p:grpSpPr/>
+      <p:sp>
+        <p:nvSpPr>
+          <p:cNvPr id="2" name="TextBox 1"/>
+          <p:cNvSpPr txBox="1"/>
+          <p:nvPr/>
+        </p:nvSpPr>
+        <p:spPr>
+          <a:xfrm>
+            <a:off x="457200" y="274320"/>
+            <a:ext cx="8229600" cy="640080"/>
+          </a:xfrm>
+          <a:prstGeom prst="rect">
+            <a:avLst/>
+          </a:prstGeom>
+          <a:noFill/>
+        </p:spPr>
+        <p:txBody>
+          <a:bodyPr wrap="square">
+            <a:spAutoFit/>
+          </a:bodyPr>
+          <a:lstStyle/>
+          <a:p>
+            <a:r>
+              <a:rPr sz="2200" b="1">
+                <a:solidFill>
+                  <a:srgbClr val="0B3D2E"/>
+                </a:solidFill>
+              </a:rPr>
+              <a:t>Diagrama de la clase</a:t>
+            </a:r>
+          </a:p>
+        </p:txBody>
+      </p:sp>
+      <p:pic>
+        <p:nvPicPr>
+          <p:cNvPr id="3" name="Picture 2" descr="accc3b458de0faea.png"/>
+          <p:cNvPicPr>
+            <a:picLocks noChangeAspect="1"/>
+          </p:cNvPicPr>
+          <p:nvPr/>
+        </p:nvPicPr>
+        <p:blipFill>
+          <a:blip r:embed="rId2"/>
+          <a:stretch>
+            <a:fillRect/>
+          </a:stretch>
+        </p:blipFill>
+        <p:spPr>
+          <a:xfrm>
+            <a:off x="457200" y="3474720"/>
+            <a:ext cx="8229600" cy="548640"/>
+          </a:xfrm>
+          <a:prstGeom prst="rect">
+            <a:avLst/>
+          </a:prstGeom>
+        </p:spPr>
+      </p:pic>
     </p:spTree>
   </p:cSld>
   <p:clrMapOvr>
@@ -3713,7 +4239,7 @@
                   <a:srgbClr val="22282E"/>
                 </a:solidFill>
               </a:rPr>
-              <a:t>•  Aprender a diseñar un Plan de Continuidad de Negocio (BCP) y un Plan de Recuperación ante Desastres (DRP) que permitan a una organización sobrevivir a incidentes graves: ransomware, incendio, caída de proveedor cloud o desastre natural. Al terminar sabrás ejecutar un Análisis de Impacto en el Negocio (BIA), calcular RTO/RPO/MTD, elegir estrategias de recuperación y probar los planes con simulacros.</a:t>
+              <a:t>•  Aprender a diseñar un Plan de Continuidad de Negocio (BCP) y un Plan de Recuperación ante Desastres (DRP) que permitan a una organización sobrevivir a incidentes graves: ransomware, incendio, caída…</a:t>
             </a:r>
           </a:p>
         </p:txBody>
@@ -4107,7 +4633,7 @@
                   <a:srgbClr val="0B3D2E"/>
                 </a:solidFill>
               </a:rPr>
-              <a:t>📖 Definiciones y características</a:t>
+              <a:t>🧠 Explicación en profundidad</a:t>
             </a:r>
           </a:p>
         </p:txBody>
@@ -4145,97 +4671,22 @@
                   <a:srgbClr val="22282E"/>
                 </a:solidFill>
               </a:rPr>
-              <a:t>•  BCP: plan para mantener las funciones críticas del negocio durante y después de una interrupción. Clave: enfoque en procesos de negocio.</a:t>
-            </a:r>
-          </a:p>
-          <a:p>
-            <a:pPr>
-              <a:spcAft>
-                <a:spcPts val="600"/>
-              </a:spcAft>
-            </a:pPr>
-            <a:r>
-              <a:rPr sz="1500">
-                <a:solidFill>
-                  <a:srgbClr val="22282E"/>
-                </a:solidFill>
-              </a:rPr>
-              <a:t>•  DRP: plan para restaurar la infraestructura tecnológica tras un desastre. Clave: subconjunto técnico del BCP.</a:t>
-            </a:r>
-          </a:p>
-          <a:p>
-            <a:pPr>
-              <a:spcAft>
-                <a:spcPts val="600"/>
-              </a:spcAft>
-            </a:pPr>
-            <a:r>
-              <a:rPr sz="1500">
-                <a:solidFill>
-                  <a:srgbClr val="22282E"/>
-                </a:solidFill>
-              </a:rPr>
-              <a:t>•  BIA: análisis que identifica procesos críticos y el impacto de su interrupción en el tiempo. Clave: alimenta RTO/RPO.</a:t>
-            </a:r>
-          </a:p>
-          <a:p>
-            <a:pPr>
-              <a:spcAft>
-                <a:spcPts val="600"/>
-              </a:spcAft>
-            </a:pPr>
-            <a:r>
-              <a:rPr sz="1500">
-                <a:solidFill>
-                  <a:srgbClr val="22282E"/>
-                </a:solidFill>
-              </a:rPr>
-              <a:t>•  RTO (Recovery Time Objective): tiempo máximo tolerable para restaurar un proceso. Clave: "¿en cuánto tiempo debo volver?".</a:t>
-            </a:r>
-          </a:p>
-          <a:p>
-            <a:pPr>
-              <a:spcAft>
-                <a:spcPts val="600"/>
-              </a:spcAft>
-            </a:pPr>
-            <a:r>
-              <a:rPr sz="1500">
-                <a:solidFill>
-                  <a:srgbClr val="22282E"/>
-                </a:solidFill>
-              </a:rPr>
-              <a:t>•  RPO (Recovery Point Objective): máxima pérdida de datos tolerable en el tiempo. Clave: define la frecuencia de backup.</a:t>
-            </a:r>
-          </a:p>
-          <a:p>
-            <a:pPr>
-              <a:spcAft>
-                <a:spcPts val="600"/>
-              </a:spcAft>
-            </a:pPr>
-            <a:r>
-              <a:rPr sz="1500">
-                <a:solidFill>
-                  <a:srgbClr val="22282E"/>
-                </a:solidFill>
-              </a:rPr>
-              <a:t>•  MTD (Maximum Tolerable Downtime): interrupción total tras la cual el negocio no se recupera. Clave: RTO &lt; MTD siempre.</a:t>
-            </a:r>
-          </a:p>
-          <a:p>
-            <a:pPr>
-              <a:spcAft>
-                <a:spcPts val="600"/>
-              </a:spcAft>
-            </a:pPr>
-            <a:r>
-              <a:rPr sz="1500">
-                <a:solidFill>
-                  <a:srgbClr val="22282E"/>
-                </a:solidFill>
-              </a:rPr>
-              <a:t>•  Sitio caliente/tibio/frío: instalación de respaldo con distinto grado de preparación. Clave: más caliente = más rápido y más caro.</a:t>
+              <a:t>•  Continuidad protege productos y procesos; recuperación restaura tecnología. El BIA identifica impactos y dependencias, mientras RTO y RPO expresan objetivos aprobados, no capacidades reales. Solo una…</a:t>
+            </a:r>
+          </a:p>
+          <a:p>
+            <a:pPr>
+              <a:spcAft>
+                <a:spcPts val="600"/>
+              </a:spcAft>
+            </a:pPr>
+            <a:r>
+              <a:rPr sz="1500">
+                <a:solidFill>
+                  <a:srgbClr val="22282E"/>
+                </a:solidFill>
+              </a:rPr>
+              <a:t>•  Un backup cumple RPO, pero restaurarlo tarda tres días por claves y red ausentes. El ejercicio revela que copia y recuperación son propiedades distintas.</a:t>
             </a:r>
           </a:p>
         </p:txBody>
@@ -4286,7 +4737,7 @@
                   <a:srgbClr val="0B3D2E"/>
                 </a:solidFill>
               </a:rPr>
-              <a:t>🧰 Herramientas y preparación</a:t>
+              <a:t>📔 Glosario operativo</a:t>
             </a:r>
           </a:p>
         </p:txBody>
@@ -4324,52 +4775,52 @@
                   <a:srgbClr val="22282E"/>
                 </a:solidFill>
               </a:rPr>
-              <a:t>•  Hoja de cálculo para el BIA y las métricas.</a:t>
-            </a:r>
-          </a:p>
-          <a:p>
-            <a:pPr>
-              <a:spcAft>
-                <a:spcPts val="600"/>
-              </a:spcAft>
-            </a:pPr>
-            <a:r>
-              <a:rPr sz="1500">
-                <a:solidFill>
-                  <a:srgbClr val="22282E"/>
-                </a:solidFill>
-              </a:rPr>
-              <a:t>•  Referencia: ISO 22301 (continuidad de negocio) y NIST SP 800-34 (Contingency Planning Guide).</a:t>
-            </a:r>
-          </a:p>
-          <a:p>
-            <a:pPr>
-              <a:spcAft>
-                <a:spcPts val="600"/>
-              </a:spcAft>
-            </a:pPr>
-            <a:r>
-              <a:rPr sz="1500">
-                <a:solidFill>
-                  <a:srgbClr val="22282E"/>
-                </a:solidFill>
-              </a:rPr>
-              <a:t>•  Para el laboratorio técnico opcional: una VM y un servicio simple (contenedor Docker) para practicar backup/restore.</a:t>
-            </a:r>
-          </a:p>
-          <a:p>
-            <a:pPr>
-              <a:spcAft>
-                <a:spcPts val="600"/>
-              </a:spcAft>
-            </a:pPr>
-            <a:r>
-              <a:rPr sz="1500">
-                <a:solidFill>
-                  <a:srgbClr val="22282E"/>
-                </a:solidFill>
-              </a:rPr>
-              <a:t>•  Herramientas de backup reales: restic, borgbackup o rsync para demostrar la regla 3-2-1.</a:t>
+              <a:t>•  Término — Definición</a:t>
+            </a:r>
+          </a:p>
+          <a:p>
+            <a:pPr>
+              <a:spcAft>
+                <a:spcPts val="600"/>
+              </a:spcAft>
+            </a:pPr>
+            <a:r>
+              <a:rPr sz="1500">
+                <a:solidFill>
+                  <a:srgbClr val="22282E"/>
+                </a:solidFill>
+              </a:rPr>
+              <a:t>•  BIA — Análisis de impacto y dependencias del negocio.</a:t>
+            </a:r>
+          </a:p>
+          <a:p>
+            <a:pPr>
+              <a:spcAft>
+                <a:spcPts val="600"/>
+              </a:spcAft>
+            </a:pPr>
+            <a:r>
+              <a:rPr sz="1500">
+                <a:solidFill>
+                  <a:srgbClr val="22282E"/>
+                </a:solidFill>
+              </a:rPr>
+              <a:t>•  RTO — Tiempo objetivo para restaurar una capacidad.</a:t>
+            </a:r>
+          </a:p>
+          <a:p>
+            <a:pPr>
+              <a:spcAft>
+                <a:spcPts val="600"/>
+              </a:spcAft>
+            </a:pPr>
+            <a:r>
+              <a:rPr sz="1500">
+                <a:solidFill>
+                  <a:srgbClr val="22282E"/>
+                </a:solidFill>
+              </a:rPr>
+              <a:t>•  RPO — Punto temporal máximo de pérdida de datos aceptada.</a:t>
             </a:r>
           </a:p>
         </p:txBody>
@@ -4420,7 +4871,7 @@
                   <a:srgbClr val="0B3D2E"/>
                 </a:solidFill>
               </a:rPr>
-              <a:t>🧪 Laboratorio guiado (ejercicio aplicado)</a:t>
+              <a:t>✅ Criterio de dominio</a:t>
             </a:r>
           </a:p>
         </p:txBody>
@@ -4458,97 +4909,7 @@
                   <a:srgbClr val="22282E"/>
                 </a:solidFill>
               </a:rPr>
-              <a:t>•  Parte A — BIA y métricas para "Ferretería del Sur S.A.":</a:t>
-            </a:r>
-          </a:p>
-          <a:p>
-            <a:pPr>
-              <a:spcAft>
-                <a:spcPts val="600"/>
-              </a:spcAft>
-            </a:pPr>
-            <a:r>
-              <a:rPr sz="1500">
-                <a:solidFill>
-                  <a:srgbClr val="22282E"/>
-                </a:solidFill>
-              </a:rPr>
-              <a:t>•  Inventario de procesos: lista 5 procesos (venta online, procesamiento de pagos, atención al cliente, facturación, marketing).</a:t>
-            </a:r>
-          </a:p>
-          <a:p>
-            <a:pPr>
-              <a:spcAft>
-                <a:spcPts val="600"/>
-              </a:spcAft>
-            </a:pPr>
-            <a:r>
-              <a:rPr sz="1500">
-                <a:solidFill>
-                  <a:srgbClr val="22282E"/>
-                </a:solidFill>
-              </a:rPr>
-              <a:t>•  Impacto en el tiempo: para cada proceso, estima el impacto (€/hora de caída) a 1 h, 8 h, 24 h y 72 h.</a:t>
-            </a:r>
-          </a:p>
-          <a:p>
-            <a:pPr>
-              <a:spcAft>
-                <a:spcPts val="600"/>
-              </a:spcAft>
-            </a:pPr>
-            <a:r>
-              <a:rPr sz="1500">
-                <a:solidFill>
-                  <a:srgbClr val="22282E"/>
-                </a:solidFill>
-              </a:rPr>
-              <a:t>•  Criticidad: clasifica cada proceso en crítico/importante/no crítico según su impacto.</a:t>
-            </a:r>
-          </a:p>
-          <a:p>
-            <a:pPr>
-              <a:spcAft>
-                <a:spcPts val="600"/>
-              </a:spcAft>
-            </a:pPr>
-            <a:r>
-              <a:rPr sz="1500">
-                <a:solidFill>
-                  <a:srgbClr val="22282E"/>
-                </a:solidFill>
-              </a:rPr>
-              <a:t>•  RTO/RPO/MTD: asigna a cada proceso crítico un MTD, un RTO (&lt; MTD) y un RPO. Ej.: pagos → MTD 4 h, RTO 1 h, RPO 15 min.</a:t>
-            </a:r>
-          </a:p>
-          <a:p>
-            <a:pPr>
-              <a:spcAft>
-                <a:spcPts val="600"/>
-              </a:spcAft>
-            </a:pPr>
-            <a:r>
-              <a:rPr sz="1500">
-                <a:solidFill>
-                  <a:srgbClr val="22282E"/>
-                </a:solidFill>
-              </a:rPr>
-              <a:t>•  Estrategia de recuperación: para cada proceso crítico elige la estrategia (HA activo-activo, sitio caliente, restauración desde backup) coherente con su RTO/RPO.</a:t>
-            </a:r>
-          </a:p>
-          <a:p>
-            <a:pPr>
-              <a:spcAft>
-                <a:spcPts val="600"/>
-              </a:spcAft>
-            </a:pPr>
-            <a:r>
-              <a:rPr sz="1500">
-                <a:solidFill>
-                  <a:srgbClr val="22282E"/>
-                </a:solidFill>
-              </a:rPr>
-              <a:t>•  Parte B — Backup 3-2-1 real (VM):</a:t>
+              <a:t>•  El alumno enlaza BIA, objetivos, diseño y evidencia de ejercicio, y comunica brechas sin confundir objetivo con resultado.</a:t>
             </a:r>
           </a:p>
         </p:txBody>
@@ -4599,7 +4960,7 @@
                   <a:srgbClr val="0B3D2E"/>
                 </a:solidFill>
               </a:rPr>
-              <a:t>✍️ Ejercicios</a:t>
+              <a:t>📖 Definiciones y características</a:t>
             </a:r>
           </a:p>
         </p:txBody>
@@ -4637,82 +4998,97 @@
                   <a:srgbClr val="22282E"/>
                 </a:solidFill>
               </a:rPr>
-              <a:t>•  Explica la diferencia entre RTO y RPO con un dibujo temporal.</a:t>
-            </a:r>
-          </a:p>
-          <a:p>
-            <a:pPr>
-              <a:spcAft>
-                <a:spcPts val="600"/>
-              </a:spcAft>
-            </a:pPr>
-            <a:r>
-              <a:rPr sz="1500">
-                <a:solidFill>
-                  <a:srgbClr val="22282E"/>
-                </a:solidFill>
-              </a:rPr>
-              <a:t>•  ¿Por qué el RTO siempre debe ser menor que el MTD?</a:t>
-            </a:r>
-          </a:p>
-          <a:p>
-            <a:pPr>
-              <a:spcAft>
-                <a:spcPts val="600"/>
-              </a:spcAft>
-            </a:pPr>
-            <a:r>
-              <a:rPr sz="1500">
-                <a:solidFill>
-                  <a:srgbClr val="22282E"/>
-                </a:solidFill>
-              </a:rPr>
-              <a:t>•  Ordena sitios frío, tibio y caliente por coste y por velocidad de recuperación.</a:t>
-            </a:r>
-          </a:p>
-          <a:p>
-            <a:pPr>
-              <a:spcAft>
-                <a:spcPts val="600"/>
-              </a:spcAft>
-            </a:pPr>
-            <a:r>
-              <a:rPr sz="1500">
-                <a:solidFill>
-                  <a:srgbClr val="22282E"/>
-                </a:solidFill>
-              </a:rPr>
-              <a:t>•  Aplica la regla 3-2-1 a un escenario y explica cómo protege frente a ransomware.</a:t>
-            </a:r>
-          </a:p>
-          <a:p>
-            <a:pPr>
-              <a:spcAft>
-                <a:spcPts val="600"/>
-              </a:spcAft>
-            </a:pPr>
-            <a:r>
-              <a:rPr sz="1500">
-                <a:solidFill>
-                  <a:srgbClr val="22282E"/>
-                </a:solidFill>
-              </a:rPr>
-              <a:t>•  Diseña un BIA de 3 procesos para una clínica dental.</a:t>
-            </a:r>
-          </a:p>
-          <a:p>
-            <a:pPr>
-              <a:spcAft>
-                <a:spcPts val="600"/>
-              </a:spcAft>
-            </a:pPr>
-            <a:r>
-              <a:rPr sz="1500">
-                <a:solidFill>
-                  <a:srgbClr val="22282E"/>
-                </a:solidFill>
-              </a:rPr>
-              <a:t>•  Propón tres tipos de prueba del plan y cuándo usar cada una.</a:t>
+              <a:t>•  BCP: plan para mantener las funciones críticas del negocio durante y después de una interrupción. Clave: enfoque en procesos de negocio.</a:t>
+            </a:r>
+          </a:p>
+          <a:p>
+            <a:pPr>
+              <a:spcAft>
+                <a:spcPts val="600"/>
+              </a:spcAft>
+            </a:pPr>
+            <a:r>
+              <a:rPr sz="1500">
+                <a:solidFill>
+                  <a:srgbClr val="22282E"/>
+                </a:solidFill>
+              </a:rPr>
+              <a:t>•  DRP: plan para restaurar la infraestructura tecnológica tras un desastre. Clave: subconjunto técnico del BCP.</a:t>
+            </a:r>
+          </a:p>
+          <a:p>
+            <a:pPr>
+              <a:spcAft>
+                <a:spcPts val="600"/>
+              </a:spcAft>
+            </a:pPr>
+            <a:r>
+              <a:rPr sz="1500">
+                <a:solidFill>
+                  <a:srgbClr val="22282E"/>
+                </a:solidFill>
+              </a:rPr>
+              <a:t>•  BIA: análisis que identifica procesos críticos y el impacto de su interrupción en el tiempo. Clave: alimenta RTO/RPO.</a:t>
+            </a:r>
+          </a:p>
+          <a:p>
+            <a:pPr>
+              <a:spcAft>
+                <a:spcPts val="600"/>
+              </a:spcAft>
+            </a:pPr>
+            <a:r>
+              <a:rPr sz="1500">
+                <a:solidFill>
+                  <a:srgbClr val="22282E"/>
+                </a:solidFill>
+              </a:rPr>
+              <a:t>•  RTO (Recovery Time Objective): tiempo máximo tolerable para restaurar un proceso. Clave: "¿en cuánto tiempo debo volver?".</a:t>
+            </a:r>
+          </a:p>
+          <a:p>
+            <a:pPr>
+              <a:spcAft>
+                <a:spcPts val="600"/>
+              </a:spcAft>
+            </a:pPr>
+            <a:r>
+              <a:rPr sz="1500">
+                <a:solidFill>
+                  <a:srgbClr val="22282E"/>
+                </a:solidFill>
+              </a:rPr>
+              <a:t>•  RPO (Recovery Point Objective): máxima pérdida de datos tolerable en el tiempo. Clave: define la frecuencia de backup.</a:t>
+            </a:r>
+          </a:p>
+          <a:p>
+            <a:pPr>
+              <a:spcAft>
+                <a:spcPts val="600"/>
+              </a:spcAft>
+            </a:pPr>
+            <a:r>
+              <a:rPr sz="1500">
+                <a:solidFill>
+                  <a:srgbClr val="22282E"/>
+                </a:solidFill>
+              </a:rPr>
+              <a:t>•  MTD (Maximum Tolerable Downtime): interrupción total tras la cual el negocio no se recupera. Clave: RTO &lt; MTD siempre.</a:t>
+            </a:r>
+          </a:p>
+          <a:p>
+            <a:pPr>
+              <a:spcAft>
+                <a:spcPts val="600"/>
+              </a:spcAft>
+            </a:pPr>
+            <a:r>
+              <a:rPr sz="1500">
+                <a:solidFill>
+                  <a:srgbClr val="22282E"/>
+                </a:solidFill>
+              </a:rPr>
+              <a:t>•  Sitio caliente/tibio/frío: instalación de respaldo con distinto grado de preparación. Clave: más caliente = más rápido y más caro.</a:t>
             </a:r>
           </a:p>
         </p:txBody>
@@ -4763,7 +5139,7 @@
                   <a:srgbClr val="0B3D2E"/>
                 </a:solidFill>
               </a:rPr>
-              <a:t>📝 Reto verificable</a:t>
+              <a:t>🧰 Herramientas y preparación</a:t>
             </a:r>
           </a:p>
         </p:txBody>
@@ -4801,22 +5177,52 @@
                   <a:srgbClr val="22282E"/>
                 </a:solidFill>
               </a:rPr>
-              <a:t>•  Entrega un BCP/DRP mínimo viable con: BIA de al menos 5 procesos, tabla RTO/RPO/MTD de los críticos, estrategia de recuperación por proceso, y evidencia de un backup/restore real (tiempo medido) más el guion de un ejercicio tabletop.</a:t>
-            </a:r>
-          </a:p>
-          <a:p>
-            <a:pPr>
-              <a:spcAft>
-                <a:spcPts val="600"/>
-              </a:spcAft>
-            </a:pPr>
-            <a:r>
-              <a:rPr sz="1500">
-                <a:solidFill>
-                  <a:srgbClr val="22282E"/>
-                </a:solidFill>
-              </a:rPr>
-              <a:t>•  Criterio de aceptación: todo proceso crítico tiene RTO &lt; MTD y un RPO coherente con su frecuencia de backup, la restauración real funciona (dato recuperado) y su tiempo se compara con el RTO objetivo.</a:t>
+              <a:t>•  Hoja de cálculo para el BIA y las métricas.</a:t>
+            </a:r>
+          </a:p>
+          <a:p>
+            <a:pPr>
+              <a:spcAft>
+                <a:spcPts val="600"/>
+              </a:spcAft>
+            </a:pPr>
+            <a:r>
+              <a:rPr sz="1500">
+                <a:solidFill>
+                  <a:srgbClr val="22282E"/>
+                </a:solidFill>
+              </a:rPr>
+              <a:t>•  Referencia: ISO 22301 (continuidad de negocio) y NIST SP 800-34 (Contingency Planning Guide).</a:t>
+            </a:r>
+          </a:p>
+          <a:p>
+            <a:pPr>
+              <a:spcAft>
+                <a:spcPts val="600"/>
+              </a:spcAft>
+            </a:pPr>
+            <a:r>
+              <a:rPr sz="1500">
+                <a:solidFill>
+                  <a:srgbClr val="22282E"/>
+                </a:solidFill>
+              </a:rPr>
+              <a:t>•  Para el laboratorio técnico opcional: una VM y un servicio simple (contenedor Docker) para practicar backup/restore.</a:t>
+            </a:r>
+          </a:p>
+          <a:p>
+            <a:pPr>
+              <a:spcAft>
+                <a:spcPts val="600"/>
+              </a:spcAft>
+            </a:pPr>
+            <a:r>
+              <a:rPr sz="1500">
+                <a:solidFill>
+                  <a:srgbClr val="22282E"/>
+                </a:solidFill>
+              </a:rPr>
+              <a:t>•  Herramientas de backup reales: restic, borgbackup o rsync para demostrar la regla 3-2-1.</a:t>
             </a:r>
           </a:p>
         </p:txBody>
